--- a/docs/velo-sin-zk-no-hay-velo.pptx
+++ b/docs/velo-sin-zk-no-hay-velo.pptx
@@ -1442,7 +1442,7 @@
                 <a:ea typeface="Courier New" pitchFamily="34" charset="-122"/>
                 <a:cs typeface="Courier New" pitchFamily="34" charset="-120"/>
               </a:rPr>
-              <a:t>VELO · MIDNIGHT HACK BUENOS AIRES</a:t>
+              <a:t>VELO · MIDNIGHT / COMPACT</a:t>
             </a:r>
             <a:endParaRPr lang="en-US" sz="1100" dirty="0"/>
           </a:p>
